--- a/public/pitch-decks/gamma/pptx/02-design-partner.pptx
+++ b/public/pitch-decks/gamma/pptx/02-design-partner.pptx
@@ -3823,6 +3823,10 @@
           </a:solidFill>
           <a:ln/>
         </p:spPr>
+        <p:txBody>
+          <a:bodyPr/>
+          <a:p/>
+        </p:txBody>
       </p:sp>
       <p:sp>
         <p:nvSpPr>
@@ -3917,6 +3921,10 @@
           </a:solidFill>
           <a:ln/>
         </p:spPr>
+        <p:txBody>
+          <a:bodyPr/>
+          <a:p/>
+        </p:txBody>
       </p:sp>
       <p:sp>
         <p:nvSpPr>
@@ -4011,6 +4019,10 @@
           </a:solidFill>
           <a:ln/>
         </p:spPr>
+        <p:txBody>
+          <a:bodyPr/>
+          <a:p/>
+        </p:txBody>
       </p:sp>
       <p:sp>
         <p:nvSpPr>
@@ -4105,6 +4117,10 @@
           </a:solidFill>
           <a:ln/>
         </p:spPr>
+        <p:txBody>
+          <a:bodyPr/>
+          <a:p/>
+        </p:txBody>
       </p:sp>
       <p:sp>
         <p:nvSpPr>
@@ -4672,7 +4688,7 @@
                   <a:srgbClr val="FFFFFF"/>
                 </a:solidFill>
               </a:rPr>
-              <a:t>"Deploy Datacendia for 90 days on a single strategic problem. If the Council doesn't identify at least 3 critical risks you missed, we refund the pilot fee — no questions asked."</a:t>
+              <a:t>"EU AI Act → enforceable auditability. DORA → operational traceability. Litigation risk → retrospective scrutiny. This creates a new infrastructure requirement: decision evidence you missed, we refund the pilot fee — no questions asked."</a:t>
             </a:r>
             <a:endParaRPr lang="en-US" sz="2200" dirty="0"/>
           </a:p>
